--- a/review_1/Proof_of_Delivery_Review1.pptx
+++ b/review_1/Proof_of_Delivery_Review1.pptx
@@ -2149,7 +2149,7 @@
                 <a:ea typeface="Calibri" pitchFamily="34" charset="-122"/>
                 <a:cs typeface="Calibri" pitchFamily="34" charset="-120"/>
               </a:rPr>
-              <a:t>Team:  </a:t>
+              <a:t>Name :  </a:t>
             </a:r>
             <a:r>
               <a:rPr lang="en-US" sz="1400" b="1" dirty="0">
@@ -2190,28 +2190,6 @@
             <a:pPr marL="0" indent="0">
               <a:buNone/>
             </a:pPr>
-            <a:r>
-              <a:rPr lang="en-US" sz="1400" b="1" dirty="0">
-                <a:solidFill>
-                  <a:srgbClr val="02C39A"/>
-                </a:solidFill>
-                <a:latin typeface="Calibri" pitchFamily="34" charset="0"/>
-                <a:ea typeface="Calibri" pitchFamily="34" charset="-122"/>
-                <a:cs typeface="Calibri" pitchFamily="34" charset="-120"/>
-              </a:rPr>
-              <a:t>Guide:  </a:t>
-            </a:r>
-            <a:r>
-              <a:rPr lang="en-US" sz="1400" dirty="0">
-                <a:solidFill>
-                  <a:srgbClr val="D7ECEA"/>
-                </a:solidFill>
-                <a:latin typeface="Calibri" pitchFamily="34" charset="0"/>
-                <a:ea typeface="Calibri" pitchFamily="34" charset="-122"/>
-                <a:cs typeface="Calibri" pitchFamily="34" charset="-120"/>
-              </a:rPr>
-              <a:t>[Guide Name], [Designation]</a:t>
-            </a:r>
             <a:endParaRPr lang="en-US" sz="1400" dirty="0"/>
           </a:p>
         </p:txBody>
@@ -8120,17 +8098,6 @@
             <a:pPr marL="0" indent="0">
               <a:buNone/>
             </a:pPr>
-            <a:r>
-              <a:rPr lang="en-US" sz="1250" dirty="0">
-                <a:solidFill>
-                  <a:srgbClr val="5FA6A8"/>
-                </a:solidFill>
-                <a:latin typeface="Calibri" pitchFamily="34" charset="0"/>
-                <a:ea typeface="Calibri" pitchFamily="34" charset="-122"/>
-                <a:cs typeface="Calibri" pitchFamily="34" charset="-120"/>
-              </a:rPr>
-              <a:t>[Student Name 1] · [Student Name 2] · [Student Name 3]</a:t>
-            </a:r>
             <a:endParaRPr lang="en-US" sz="1250" dirty="0"/>
           </a:p>
         </p:txBody>
